--- a/project/project.pptx
+++ b/project/project.pptx
@@ -6,7 +6,7 @@
     <p:sldMasterId id="2147483681" r:id="rId2"/>
   </p:sldMasterIdLst>
   <p:notesMasterIdLst>
-    <p:notesMasterId r:id="rId13"/>
+    <p:notesMasterId r:id="rId15"/>
   </p:notesMasterIdLst>
   <p:sldIdLst>
     <p:sldId id="256" r:id="rId3"/>
@@ -16,26 +16,28 @@
     <p:sldId id="262" r:id="rId7"/>
     <p:sldId id="299" r:id="rId8"/>
     <p:sldId id="300" r:id="rId9"/>
-    <p:sldId id="301" r:id="rId10"/>
-    <p:sldId id="263" r:id="rId11"/>
-    <p:sldId id="265" r:id="rId12"/>
+    <p:sldId id="303" r:id="rId10"/>
+    <p:sldId id="304" r:id="rId11"/>
+    <p:sldId id="305" r:id="rId12"/>
+    <p:sldId id="302" r:id="rId13"/>
+    <p:sldId id="265" r:id="rId14"/>
   </p:sldIdLst>
   <p:sldSz cx="9144000" cy="5143500" type="screen16x9"/>
   <p:notesSz cx="6858000" cy="9144000"/>
   <p:embeddedFontLst>
     <p:embeddedFont>
       <p:font typeface="Roboto" panose="02000000000000000000" pitchFamily="2" charset="0"/>
-      <p:regular r:id="rId14"/>
-      <p:bold r:id="rId15"/>
-      <p:italic r:id="rId16"/>
-      <p:boldItalic r:id="rId17"/>
+      <p:regular r:id="rId16"/>
+      <p:bold r:id="rId17"/>
+      <p:italic r:id="rId18"/>
+      <p:boldItalic r:id="rId19"/>
     </p:embeddedFont>
     <p:embeddedFont>
-      <p:font typeface="Roboto Medium" panose="02000000000000000000" pitchFamily="2" charset="0"/>
-      <p:regular r:id="rId18"/>
-      <p:bold r:id="rId19"/>
-      <p:italic r:id="rId20"/>
-      <p:boldItalic r:id="rId21"/>
+      <p:font typeface="Roboto Medium" panose="020F0502020204030204" pitchFamily="34" charset="0"/>
+      <p:regular r:id="rId20"/>
+      <p:bold r:id="rId21"/>
+      <p:italic r:id="rId22"/>
+      <p:boldItalic r:id="rId23"/>
     </p:embeddedFont>
   </p:embeddedFontLst>
   <p:defaultTextStyle>
@@ -1329,11 +1331,11 @@
 </file>
 
 <file path=ppt/notesSlides/notesSlide7.xml><?xml version="1.0" encoding="utf-8"?>
-<p:notes xmlns:a="http://schemas.openxmlformats.org/drawingml/2006/main" xmlns:r="http://schemas.openxmlformats.org/officeDocument/2006/relationships" xmlns:p="http://schemas.openxmlformats.org/presentationml/2006/main" showMasterSp="0" showMasterPhAnim="0">
+<p:notes xmlns:a="http://schemas.openxmlformats.org/drawingml/2006/main" xmlns:r="http://schemas.openxmlformats.org/officeDocument/2006/relationships" xmlns:p="http://schemas.openxmlformats.org/presentationml/2006/main">
   <p:cSld>
     <p:spTree>
       <p:nvGrpSpPr>
-        <p:cNvPr id="1" name="Shape 208"/>
+        <p:cNvPr id="1" name=""/>
         <p:cNvGrpSpPr/>
         <p:nvPr/>
       </p:nvGrpSpPr>
@@ -1347,84 +1349,46 @@
       </p:grpSpPr>
       <p:sp>
         <p:nvSpPr>
-          <p:cNvPr id="209" name="Google Shape;209;gf98075b259_0_51:notes"/>
+          <p:cNvPr id="2" name="Образ слайда 1"/>
           <p:cNvSpPr>
             <a:spLocks noGrp="1" noRot="1" noChangeAspect="1"/>
           </p:cNvSpPr>
           <p:nvPr>
-            <p:ph type="sldImg" idx="2"/>
+            <p:ph type="sldImg"/>
           </p:nvPr>
         </p:nvSpPr>
         <p:spPr>
           <a:xfrm>
-            <a:off x="381309" y="685800"/>
+            <a:off x="381000" y="685800"/>
             <a:ext cx="6096000" cy="3429000"/>
           </a:xfrm>
-          <a:custGeom>
-            <a:avLst/>
-            <a:gdLst/>
-            <a:ahLst/>
-            <a:cxnLst/>
-            <a:rect l="l" t="t" r="r" b="b"/>
-            <a:pathLst>
-              <a:path w="120000" h="120000" extrusionOk="0">
-                <a:moveTo>
-                  <a:pt x="0" y="0"/>
-                </a:moveTo>
-                <a:lnTo>
-                  <a:pt x="120000" y="0"/>
-                </a:lnTo>
-                <a:lnTo>
-                  <a:pt x="120000" y="120000"/>
-                </a:lnTo>
-                <a:lnTo>
-                  <a:pt x="0" y="120000"/>
-                </a:lnTo>
-                <a:close/>
-              </a:path>
-            </a:pathLst>
-          </a:custGeom>
         </p:spPr>
       </p:sp>
       <p:sp>
         <p:nvSpPr>
-          <p:cNvPr id="210" name="Google Shape;210;gf98075b259_0_51:notes"/>
-          <p:cNvSpPr txBox="1">
+          <p:cNvPr id="3" name="Заметки 2"/>
+          <p:cNvSpPr>
             <a:spLocks noGrp="1"/>
           </p:cNvSpPr>
           <p:nvPr>
             <p:ph type="body" idx="1"/>
           </p:nvPr>
         </p:nvSpPr>
-        <p:spPr>
-          <a:xfrm>
-            <a:off x="685800" y="4343400"/>
-            <a:ext cx="5486400" cy="4114800"/>
-          </a:xfrm>
-          <a:prstGeom prst="rect">
-            <a:avLst/>
-          </a:prstGeom>
-        </p:spPr>
+        <p:spPr/>
         <p:txBody>
-          <a:bodyPr spcFirstLastPara="1" wrap="square" lIns="91425" tIns="91425" rIns="91425" bIns="91425" anchor="t" anchorCtr="0">
-            <a:noAutofit/>
-          </a:bodyPr>
+          <a:bodyPr/>
           <a:lstStyle/>
           <a:p>
-            <a:pPr marL="0" lvl="0" indent="0" algn="l" rtl="0">
-              <a:spcBef>
-                <a:spcPts val="0"/>
-              </a:spcBef>
-              <a:spcAft>
-                <a:spcPts val="0"/>
-              </a:spcAft>
-              <a:buNone/>
-            </a:pPr>
-            <a:endParaRPr/>
+            <a:endParaRPr lang="ru-BY" dirty="0"/>
           </a:p>
         </p:txBody>
       </p:sp>
     </p:spTree>
+    <p:extLst>
+      <p:ext uri="{BB962C8B-B14F-4D97-AF65-F5344CB8AC3E}">
+        <p14:creationId xmlns:p14="http://schemas.microsoft.com/office/powerpoint/2010/main" val="1522144773"/>
+      </p:ext>
+    </p:extLst>
   </p:cSld>
   <p:clrMapOvr>
     <a:masterClrMapping/>
@@ -10493,6 +10457,454 @@
   <p:cSld>
     <p:spTree>
       <p:nvGrpSpPr>
+        <p:cNvPr id="1" name=""/>
+        <p:cNvGrpSpPr/>
+        <p:nvPr/>
+      </p:nvGrpSpPr>
+      <p:grpSpPr>
+        <a:xfrm>
+          <a:off x="0" y="0"/>
+          <a:ext cx="0" cy="0"/>
+          <a:chOff x="0" y="0"/>
+          <a:chExt cx="0" cy="0"/>
+        </a:xfrm>
+      </p:grpSpPr>
+      <p:sp>
+        <p:nvSpPr>
+          <p:cNvPr id="2" name="Заголовок 1">
+            <a:extLst>
+              <a:ext uri="{FF2B5EF4-FFF2-40B4-BE49-F238E27FC236}">
+                <a16:creationId xmlns:a16="http://schemas.microsoft.com/office/drawing/2014/main" id="{7BCD35DB-5CDC-8705-BBF1-9EE8DC1389E4}"/>
+              </a:ext>
+            </a:extLst>
+          </p:cNvPr>
+          <p:cNvSpPr>
+            <a:spLocks noGrp="1"/>
+          </p:cNvSpPr>
+          <p:nvPr>
+            <p:ph type="title"/>
+          </p:nvPr>
+        </p:nvSpPr>
+        <p:spPr/>
+        <p:txBody>
+          <a:bodyPr/>
+          <a:lstStyle/>
+          <a:p>
+            <a:r>
+              <a:rPr lang="ru-BY" dirty="0">
+                <a:latin typeface="+mn-lt"/>
+              </a:rPr>
+              <a:t>Результаты</a:t>
+            </a:r>
+          </a:p>
+        </p:txBody>
+      </p:sp>
+      <p:pic>
+        <p:nvPicPr>
+          <p:cNvPr id="4" name="Рисунок 3">
+            <a:extLst>
+              <a:ext uri="{FF2B5EF4-FFF2-40B4-BE49-F238E27FC236}">
+                <a16:creationId xmlns:a16="http://schemas.microsoft.com/office/drawing/2014/main" id="{A5BF28EA-B36B-B8FB-F031-1BCE018DCE3A}"/>
+              </a:ext>
+            </a:extLst>
+          </p:cNvPr>
+          <p:cNvPicPr>
+            <a:picLocks noChangeAspect="1"/>
+          </p:cNvPicPr>
+          <p:nvPr/>
+        </p:nvPicPr>
+        <p:blipFill>
+          <a:blip r:embed="rId2"/>
+          <a:stretch>
+            <a:fillRect/>
+          </a:stretch>
+        </p:blipFill>
+        <p:spPr>
+          <a:xfrm>
+            <a:off x="762344" y="3305710"/>
+            <a:ext cx="7772400" cy="1537159"/>
+          </a:xfrm>
+          <a:prstGeom prst="rect">
+            <a:avLst/>
+          </a:prstGeom>
+        </p:spPr>
+      </p:pic>
+      <p:sp>
+        <p:nvSpPr>
+          <p:cNvPr id="3" name="Текст 2">
+            <a:extLst>
+              <a:ext uri="{FF2B5EF4-FFF2-40B4-BE49-F238E27FC236}">
+                <a16:creationId xmlns:a16="http://schemas.microsoft.com/office/drawing/2014/main" id="{CF656626-A13E-3F49-AD5C-8F97433F67F2}"/>
+              </a:ext>
+            </a:extLst>
+          </p:cNvPr>
+          <p:cNvSpPr>
+            <a:spLocks noGrp="1"/>
+          </p:cNvSpPr>
+          <p:nvPr>
+            <p:ph type="body" idx="1"/>
+          </p:nvPr>
+        </p:nvSpPr>
+        <p:spPr>
+          <a:xfrm>
+            <a:off x="388244" y="1006340"/>
+            <a:ext cx="8520600" cy="3416400"/>
+          </a:xfrm>
+        </p:spPr>
+        <p:txBody>
+          <a:bodyPr/>
+          <a:lstStyle/>
+          <a:p>
+            <a:pPr marL="133350" indent="0" algn="ctr">
+              <a:buNone/>
+            </a:pPr>
+            <a:r>
+              <a:rPr lang="ru-RU" dirty="0"/>
+              <a:t>По </a:t>
+            </a:r>
+            <a:r>
+              <a:rPr lang="es-419" dirty="0"/>
+              <a:t>PR-AUC </a:t>
+            </a:r>
+            <a:r>
+              <a:rPr lang="ru-RU" dirty="0"/>
+              <a:t>на проверочной выборке лучший — </a:t>
+            </a:r>
+            <a:r>
+              <a:rPr lang="es-419" b="1" dirty="0"/>
+              <a:t>CatBoost</a:t>
+            </a:r>
+            <a:r>
+              <a:rPr lang="es-419" dirty="0"/>
+              <a:t> (0.179)</a:t>
+            </a:r>
+            <a:endParaRPr lang="ru-RU" dirty="0"/>
+          </a:p>
+          <a:p>
+            <a:pPr marL="133350" indent="0" algn="ctr">
+              <a:buNone/>
+            </a:pPr>
+            <a:r>
+              <a:rPr lang="ru-RU" dirty="0"/>
+              <a:t>На тесте у него показатели выше остальных</a:t>
+            </a:r>
+          </a:p>
+          <a:p>
+            <a:pPr marL="133350" indent="0" algn="ctr">
+              <a:buNone/>
+            </a:pPr>
+            <a:r>
+              <a:rPr lang="es-419" dirty="0"/>
+              <a:t>LogReg L2 </a:t>
+            </a:r>
+            <a:r>
+              <a:rPr lang="ru-RU" dirty="0"/>
+              <a:t>и </a:t>
+            </a:r>
+            <a:r>
+              <a:rPr lang="en-US" dirty="0" err="1"/>
+              <a:t>LogReg</a:t>
+            </a:r>
+            <a:r>
+              <a:rPr lang="en-US" dirty="0"/>
+              <a:t> (none) </a:t>
+            </a:r>
+            <a:r>
+              <a:rPr lang="ru-RU" dirty="0"/>
+              <a:t>справились чуть хуже</a:t>
+            </a:r>
+            <a:r>
+              <a:rPr lang="en-US" dirty="0"/>
+              <a:t>, </a:t>
+            </a:r>
+            <a:r>
+              <a:rPr lang="ru-RU" dirty="0"/>
+              <a:t>но как альтернатива справляются</a:t>
+            </a:r>
+          </a:p>
+          <a:p>
+            <a:pPr marL="133350" indent="0" algn="ctr">
+              <a:buNone/>
+            </a:pPr>
+            <a:endParaRPr lang="ru-RU" dirty="0"/>
+          </a:p>
+          <a:p>
+            <a:pPr marL="133350" indent="0" algn="ctr">
+              <a:buNone/>
+            </a:pPr>
+            <a:r>
+              <a:rPr lang="es-419" dirty="0"/>
+              <a:t>L1 </a:t>
+            </a:r>
+            <a:r>
+              <a:rPr lang="ru-RU" dirty="0"/>
+              <a:t>и </a:t>
+            </a:r>
+            <a:r>
+              <a:rPr lang="es-419" dirty="0"/>
+              <a:t>ElasticNet </a:t>
+            </a:r>
+            <a:r>
+              <a:rPr lang="ru-RU" dirty="0"/>
+              <a:t>фактически не работают (</a:t>
+            </a:r>
+            <a:r>
+              <a:rPr lang="es-419" dirty="0"/>
+              <a:t>ROC-AUC = 0.5; </a:t>
+            </a:r>
+            <a:r>
+              <a:rPr lang="ru-RU" dirty="0"/>
+              <a:t>у </a:t>
+            </a:r>
+            <a:r>
+              <a:rPr lang="es-419" dirty="0"/>
+              <a:t>L1 F1 = 0).</a:t>
+            </a:r>
+          </a:p>
+          <a:p>
+            <a:pPr marL="133350" indent="0">
+              <a:buNone/>
+            </a:pPr>
+            <a:br>
+              <a:rPr lang="es-419" dirty="0"/>
+            </a:br>
+            <a:endParaRPr lang="ru-BY" dirty="0"/>
+          </a:p>
+        </p:txBody>
+      </p:sp>
+    </p:spTree>
+    <p:extLst>
+      <p:ext uri="{BB962C8B-B14F-4D97-AF65-F5344CB8AC3E}">
+        <p14:creationId xmlns:p14="http://schemas.microsoft.com/office/powerpoint/2010/main" val="3563053905"/>
+      </p:ext>
+    </p:extLst>
+  </p:cSld>
+  <p:clrMapOvr>
+    <a:masterClrMapping/>
+  </p:clrMapOvr>
+</p:sld>
+</file>
+
+<file path=ppt/slides/slide11.xml><?xml version="1.0" encoding="utf-8"?>
+<p:sld xmlns:a="http://schemas.openxmlformats.org/drawingml/2006/main" xmlns:r="http://schemas.openxmlformats.org/officeDocument/2006/relationships" xmlns:p="http://schemas.openxmlformats.org/presentationml/2006/main">
+  <p:cSld>
+    <p:spTree>
+      <p:nvGrpSpPr>
+        <p:cNvPr id="1" name=""/>
+        <p:cNvGrpSpPr/>
+        <p:nvPr/>
+      </p:nvGrpSpPr>
+      <p:grpSpPr>
+        <a:xfrm>
+          <a:off x="0" y="0"/>
+          <a:ext cx="0" cy="0"/>
+          <a:chOff x="0" y="0"/>
+          <a:chExt cx="0" cy="0"/>
+        </a:xfrm>
+      </p:grpSpPr>
+      <p:sp>
+        <p:nvSpPr>
+          <p:cNvPr id="2" name="Заголовок 1">
+            <a:extLst>
+              <a:ext uri="{FF2B5EF4-FFF2-40B4-BE49-F238E27FC236}">
+                <a16:creationId xmlns:a16="http://schemas.microsoft.com/office/drawing/2014/main" id="{B0C7258C-E12A-6BFE-D557-854C1D508025}"/>
+              </a:ext>
+            </a:extLst>
+          </p:cNvPr>
+          <p:cNvSpPr>
+            <a:spLocks noGrp="1"/>
+          </p:cNvSpPr>
+          <p:nvPr>
+            <p:ph type="title"/>
+          </p:nvPr>
+        </p:nvSpPr>
+        <p:spPr/>
+        <p:txBody>
+          <a:bodyPr/>
+          <a:lstStyle/>
+          <a:p>
+            <a:r>
+              <a:rPr lang="ru-BY" dirty="0"/>
+              <a:t>Результаты</a:t>
+            </a:r>
+          </a:p>
+        </p:txBody>
+      </p:sp>
+      <p:pic>
+        <p:nvPicPr>
+          <p:cNvPr id="4" name="Рисунок 3">
+            <a:extLst>
+              <a:ext uri="{FF2B5EF4-FFF2-40B4-BE49-F238E27FC236}">
+                <a16:creationId xmlns:a16="http://schemas.microsoft.com/office/drawing/2014/main" id="{99837E02-3FD6-CD4D-4CC5-058E7775B824}"/>
+              </a:ext>
+            </a:extLst>
+          </p:cNvPr>
+          <p:cNvPicPr>
+            <a:picLocks noChangeAspect="1"/>
+          </p:cNvPicPr>
+          <p:nvPr/>
+        </p:nvPicPr>
+        <p:blipFill>
+          <a:blip r:embed="rId2"/>
+          <a:stretch>
+            <a:fillRect/>
+          </a:stretch>
+        </p:blipFill>
+        <p:spPr>
+          <a:xfrm>
+            <a:off x="5181600" y="1010616"/>
+            <a:ext cx="3090206" cy="2107679"/>
+          </a:xfrm>
+          <a:prstGeom prst="rect">
+            <a:avLst/>
+          </a:prstGeom>
+        </p:spPr>
+      </p:pic>
+      <p:sp>
+        <p:nvSpPr>
+          <p:cNvPr id="3" name="Текст 2">
+            <a:extLst>
+              <a:ext uri="{FF2B5EF4-FFF2-40B4-BE49-F238E27FC236}">
+                <a16:creationId xmlns:a16="http://schemas.microsoft.com/office/drawing/2014/main" id="{DA3AE598-3190-E6B7-4153-348B13144524}"/>
+              </a:ext>
+            </a:extLst>
+          </p:cNvPr>
+          <p:cNvSpPr>
+            <a:spLocks noGrp="1"/>
+          </p:cNvSpPr>
+          <p:nvPr>
+            <p:ph type="body" idx="1"/>
+          </p:nvPr>
+        </p:nvSpPr>
+        <p:spPr>
+          <a:xfrm>
+            <a:off x="500550" y="878674"/>
+            <a:ext cx="4203255" cy="3524814"/>
+          </a:xfrm>
+        </p:spPr>
+        <p:txBody>
+          <a:bodyPr/>
+          <a:lstStyle/>
+          <a:p>
+            <a:pPr marL="133350" indent="0">
+              <a:buNone/>
+            </a:pPr>
+            <a:r>
+              <a:rPr lang="ru-BY" dirty="0"/>
+              <a:t>По итогу ключевые признаки: </a:t>
+            </a:r>
+            <a:r>
+              <a:rPr lang="ru-RU" dirty="0"/>
+              <a:t>месяц контакта, число звонков, семейное положение и </a:t>
+            </a:r>
+            <a:r>
+              <a:rPr lang="ru-RU" dirty="0">
+                <a:latin typeface="+mn-lt"/>
+              </a:rPr>
+              <a:t>баланс</a:t>
+            </a:r>
+            <a:r>
+              <a:rPr lang="ru-RU" dirty="0"/>
+              <a:t> клиента.</a:t>
+            </a:r>
+          </a:p>
+          <a:p>
+            <a:endParaRPr lang="ru-RU" dirty="0"/>
+          </a:p>
+          <a:p>
+            <a:endParaRPr lang="ru-RU" dirty="0"/>
+          </a:p>
+          <a:p>
+            <a:endParaRPr lang="ru-RU" dirty="0"/>
+          </a:p>
+          <a:p>
+            <a:endParaRPr lang="ru-RU" dirty="0"/>
+          </a:p>
+          <a:p>
+            <a:endParaRPr lang="ru-RU" dirty="0"/>
+          </a:p>
+          <a:p>
+            <a:pPr marL="133350" indent="0">
+              <a:buNone/>
+            </a:pPr>
+            <a:r>
+              <a:rPr lang="es-419" dirty="0"/>
+              <a:t>Train/val/test: </a:t>
+            </a:r>
+            <a:r>
+              <a:rPr lang="ru-RU" dirty="0"/>
+              <a:t>по </a:t>
+            </a:r>
+            <a:r>
+              <a:rPr lang="es-419" dirty="0"/>
+              <a:t>ROC-AUC </a:t>
+            </a:r>
+            <a:r>
+              <a:rPr lang="ru-RU" dirty="0"/>
+              <a:t>переобучения нет; на </a:t>
+            </a:r>
+            <a:r>
+              <a:rPr lang="es-419" dirty="0"/>
+              <a:t>test </a:t>
+            </a:r>
+            <a:r>
+              <a:rPr lang="ru-RU" dirty="0"/>
+              <a:t>качество выше из‑за сдвига доли согласий во времени.</a:t>
+            </a:r>
+          </a:p>
+          <a:p>
+            <a:endParaRPr lang="ru-BY" dirty="0"/>
+          </a:p>
+        </p:txBody>
+      </p:sp>
+      <p:pic>
+        <p:nvPicPr>
+          <p:cNvPr id="5" name="Рисунок 4">
+            <a:extLst>
+              <a:ext uri="{FF2B5EF4-FFF2-40B4-BE49-F238E27FC236}">
+                <a16:creationId xmlns:a16="http://schemas.microsoft.com/office/drawing/2014/main" id="{B311B4FE-5D05-DB2F-6B8E-34B54A8385E6}"/>
+              </a:ext>
+            </a:extLst>
+          </p:cNvPr>
+          <p:cNvPicPr>
+            <a:picLocks noChangeAspect="1"/>
+          </p:cNvPicPr>
+          <p:nvPr/>
+        </p:nvPicPr>
+        <p:blipFill>
+          <a:blip r:embed="rId3"/>
+          <a:stretch>
+            <a:fillRect/>
+          </a:stretch>
+        </p:blipFill>
+        <p:spPr>
+          <a:xfrm>
+            <a:off x="4760850" y="3521771"/>
+            <a:ext cx="4001542" cy="1095900"/>
+          </a:xfrm>
+          <a:prstGeom prst="rect">
+            <a:avLst/>
+          </a:prstGeom>
+        </p:spPr>
+      </p:pic>
+    </p:spTree>
+    <p:extLst>
+      <p:ext uri="{BB962C8B-B14F-4D97-AF65-F5344CB8AC3E}">
+        <p14:creationId xmlns:p14="http://schemas.microsoft.com/office/powerpoint/2010/main" val="1722793946"/>
+      </p:ext>
+    </p:extLst>
+  </p:cSld>
+  <p:clrMapOvr>
+    <a:masterClrMapping/>
+  </p:clrMapOvr>
+</p:sld>
+</file>
+
+<file path=ppt/slides/slide12.xml><?xml version="1.0" encoding="utf-8"?>
+<p:sld xmlns:a="http://schemas.openxmlformats.org/drawingml/2006/main" xmlns:r="http://schemas.openxmlformats.org/officeDocument/2006/relationships" xmlns:p="http://schemas.openxmlformats.org/presentationml/2006/main">
+  <p:cSld>
+    <p:spTree>
+      <p:nvGrpSpPr>
         <p:cNvPr id="1" name="Shape 233"/>
         <p:cNvGrpSpPr/>
         <p:nvPr/>
@@ -10568,14 +10980,14 @@
               <a:buNone/>
             </a:pPr>
             <a:r>
-              <a:rPr lang="ru" sz="5000">
+              <a:rPr lang="ru" sz="5000" dirty="0">
                 <a:solidFill>
                   <a:schemeClr val="lt1"/>
                 </a:solidFill>
               </a:rPr>
               <a:t>Спасибо за внимание!</a:t>
             </a:r>
-            <a:endParaRPr sz="5000">
+            <a:endParaRPr sz="5000" dirty="0">
               <a:solidFill>
                 <a:schemeClr val="lt1"/>
               </a:solidFill>
@@ -11988,8 +12400,14 @@
               <a:buNone/>
             </a:pPr>
             <a:r>
+              <a:rPr lang="ru-RU" sz="3000" dirty="0">
+                <a:latin typeface="+mj-lt"/>
+              </a:rPr>
+              <a:t>Изначальные</a:t>
+            </a:r>
+            <a:r>
               <a:rPr lang="ru-RU" sz="3000" dirty="0"/>
-              <a:t>Изначальные данные</a:t>
+              <a:t> данные</a:t>
             </a:r>
             <a:endParaRPr sz="3000" dirty="0"/>
           </a:p>
@@ -13149,7 +13567,17 @@
           <a:p>
             <a:r>
               <a:rPr lang="ru-BY" b="1" dirty="0"/>
-              <a:t>Общий объем данных: </a:t>
+              <a:t>Общий </a:t>
+            </a:r>
+            <a:r>
+              <a:rPr lang="ru-BY" b="1" dirty="0">
+                <a:latin typeface="+mn-lt"/>
+              </a:rPr>
+              <a:t>объем</a:t>
+            </a:r>
+            <a:r>
+              <a:rPr lang="ru-BY" b="1" dirty="0"/>
+              <a:t> данных: </a:t>
             </a:r>
             <a:r>
               <a:rPr lang="ru-BY" dirty="0"/>
@@ -13469,7 +13897,7 @@
           <a:p>
             <a:r>
               <a:rPr lang="ru-BY" dirty="0"/>
-              <a:t>Выбор метрики и параметров подготовки</a:t>
+              <a:t>Выбор метрики</a:t>
             </a:r>
           </a:p>
         </p:txBody>
@@ -13492,59 +13920,109 @@
         </p:nvSpPr>
         <p:spPr/>
         <p:txBody>
-          <a:bodyPr/>
+          <a:bodyPr>
+            <a:normAutofit/>
+          </a:bodyPr>
           <a:lstStyle/>
           <a:p>
+            <a:pPr marL="133350" indent="0" algn="ctr">
+              <a:buNone/>
+            </a:pPr>
             <a:r>
-              <a:rPr lang="ru-BY" sz="1800" dirty="0"/>
+              <a:rPr lang="ru-BY" sz="1800" dirty="0">
+                <a:latin typeface="+mn-lt"/>
+              </a:rPr>
               <a:t>Так как классы несбалансированы (ответ </a:t>
             </a:r>
             <a:r>
-              <a:rPr lang="en-US" sz="1800" dirty="0"/>
+              <a:rPr lang="en-US" sz="1800" dirty="0">
+                <a:latin typeface="+mn-lt"/>
+              </a:rPr>
               <a:t>“yes” </a:t>
             </a:r>
             <a:r>
-              <a:rPr lang="ru-BY" sz="1800" dirty="0"/>
-              <a:t>более важен для итоговой цели, но его общий процент небольшой) выбрана метрика PR-AUC</a:t>
+              <a:rPr lang="ru-BY" sz="1800" dirty="0">
+                <a:latin typeface="+mn-lt"/>
+              </a:rPr>
+              <a:t>более важен для итоговой цели, но его общий процент небольшой) выбрана </a:t>
+            </a:r>
+            <a:br>
+              <a:rPr lang="ru-BY" sz="1800" dirty="0">
+                <a:latin typeface="+mn-lt"/>
+              </a:rPr>
+            </a:br>
+            <a:r>
+              <a:rPr lang="ru-BY" sz="1800" dirty="0">
+                <a:latin typeface="+mn-lt"/>
+              </a:rPr>
+              <a:t>метрика PR-AUC</a:t>
             </a:r>
           </a:p>
           <a:p>
+            <a:pPr marL="133350" indent="0" algn="ctr">
+              <a:buNone/>
+            </a:pPr>
             <a:r>
-              <a:rPr lang="ru-BY" sz="1800" dirty="0"/>
+              <a:rPr lang="es-419" sz="1800" i="0" dirty="0">
+                <a:effectLst/>
+                <a:latin typeface="+mn-lt"/>
+              </a:rPr>
               <a:t>Accuracy</a:t>
             </a:r>
             <a:r>
-              <a:rPr lang="ru-BY" sz="1800" b="1" dirty="0"/>
-              <a:t> </a:t>
+              <a:rPr lang="es-419" sz="1800" b="0" i="0" dirty="0">
+                <a:effectLst/>
+                <a:latin typeface="+mn-lt"/>
+              </a:rPr>
+              <a:t> </a:t>
             </a:r>
             <a:r>
-              <a:rPr lang="ru-BY" sz="1800" dirty="0"/>
-              <a:t>даст 88% </a:t>
+              <a:rPr lang="ru-RU" sz="1800" dirty="0">
+                <a:latin typeface="+mn-lt"/>
+              </a:rPr>
+              <a:t>не подходит - отказов около 88%, поэтому модель, которая всегда говорит “</a:t>
             </a:r>
             <a:r>
-              <a:rPr lang="ru-RU" sz="1800" dirty="0"/>
-              <a:t>верных ответов по </a:t>
+              <a:rPr lang="es-419" sz="1800" dirty="0">
+                <a:latin typeface="+mn-lt"/>
+              </a:rPr>
+              <a:t>no”, </a:t>
             </a:r>
             <a:r>
-              <a:rPr lang="en-US" sz="1800" dirty="0"/>
-              <a:t>“no” </a:t>
+              <a:rPr lang="ru-RU" sz="1800" dirty="0">
+                <a:latin typeface="+mn-lt"/>
+              </a:rPr>
+              <a:t>уже получит </a:t>
             </a:r>
             <a:r>
-              <a:rPr lang="ru-RU" sz="1800" dirty="0"/>
-              <a:t>и будет бесполезна, так как нас интересуют клиенты которые согласятся на вклад.</a:t>
+              <a:rPr lang="es-419" sz="1800" dirty="0">
+                <a:latin typeface="+mn-lt"/>
+              </a:rPr>
+              <a:t>accuracy ≈ 88%</a:t>
             </a:r>
-            <a:endParaRPr lang="en-US" sz="1800" dirty="0"/>
+            <a:endParaRPr lang="ru-RU" sz="1800" dirty="0">
+              <a:latin typeface="+mn-lt"/>
+            </a:endParaRPr>
           </a:p>
           <a:p>
+            <a:pPr marL="133350" indent="0" algn="ctr">
+              <a:buNone/>
+            </a:pPr>
             <a:r>
-              <a:rPr lang="ru-BY" sz="1800" dirty="0"/>
+              <a:rPr lang="ru-BY" sz="1800" dirty="0">
+                <a:latin typeface="+mn-lt"/>
+              </a:rPr>
               <a:t>Precision, recall и F1 зависят от выбранного порога вероятности</a:t>
             </a:r>
             <a:r>
-              <a:rPr lang="ru-RU" sz="1800" dirty="0"/>
+              <a:rPr lang="ru-RU" sz="1800" dirty="0">
+                <a:latin typeface="+mn-lt"/>
+              </a:rPr>
               <a:t>, при пороге 0,5 модель найдет много согласий, но будет много ложных согласий, а если порог повысить то будут пропущены клиенты, которые могли бы согласиться в теории.</a:t>
             </a:r>
-            <a:endParaRPr lang="ru-BY" sz="1800" dirty="0"/>
+            <a:endParaRPr lang="ru-BY" sz="1800" dirty="0">
+              <a:latin typeface="+mn-lt"/>
+            </a:endParaRPr>
           </a:p>
           <a:p>
             <a:endParaRPr lang="ru-BY" dirty="0"/>
@@ -13604,7 +14082,7 @@
           <a:p>
             <a:r>
               <a:rPr lang="ru-BY" b="0" dirty="0"/>
-              <a:t>Выбор скейлера</a:t>
+              <a:t>Выбор скейлера и подготовка</a:t>
             </a:r>
             <a:endParaRPr lang="ru-BY" dirty="0"/>
           </a:p>
@@ -13628,41 +14106,227 @@
         </p:nvSpPr>
         <p:spPr/>
         <p:txBody>
-          <a:bodyPr/>
+          <a:bodyPr>
+            <a:normAutofit fontScale="92500" lnSpcReduction="20000"/>
+          </a:bodyPr>
           <a:lstStyle/>
           <a:p>
             <a:pPr marL="133350" indent="0">
               <a:buNone/>
             </a:pPr>
             <a:r>
-              <a:rPr lang="ru-BY" dirty="0"/>
+              <a:rPr lang="ru-BY" dirty="0">
+                <a:latin typeface="+mn-lt"/>
+              </a:rPr>
               <a:t>Сравнивались StandardScaler и RobustScaler на проверочной выборке по PR-AUC.</a:t>
             </a:r>
             <a:br>
-              <a:rPr lang="ru-BY" dirty="0"/>
+              <a:rPr lang="ru-BY" dirty="0">
+                <a:latin typeface="+mn-lt"/>
+              </a:rPr>
             </a:br>
             <a:r>
-              <a:rPr lang="ru-BY" dirty="0"/>
+              <a:rPr lang="ru-BY" dirty="0">
+                <a:latin typeface="+mn-lt"/>
+              </a:rPr>
               <a:t>RobustScaler проверялся из‑за выбросов у полей balance, campaign и previous.</a:t>
             </a:r>
             <a:br>
-              <a:rPr lang="ru-BY" dirty="0"/>
+              <a:rPr lang="ru-BY" dirty="0">
+                <a:latin typeface="+mn-lt"/>
+              </a:rPr>
             </a:br>
-            <a:endParaRPr lang="ru-BY" dirty="0"/>
+            <a:endParaRPr lang="ru-BY" dirty="0">
+              <a:latin typeface="+mn-lt"/>
+            </a:endParaRPr>
           </a:p>
           <a:p>
             <a:pPr marL="133350" indent="0">
               <a:buNone/>
             </a:pPr>
             <a:r>
-              <a:rPr lang="ru-BY" dirty="0"/>
+              <a:rPr lang="ru-BY" dirty="0">
+                <a:latin typeface="+mn-lt"/>
+              </a:rPr>
               <a:t>Лучший вариант — </a:t>
             </a:r>
             <a:r>
-              <a:rPr lang="ru-BY" b="1" dirty="0"/>
+              <a:rPr lang="ru-BY" b="1" dirty="0">
+                <a:latin typeface="+mn-lt"/>
+              </a:rPr>
               <a:t>StandardScaler + was_contacted_before</a:t>
             </a:r>
-            <a:endParaRPr lang="ru-BY" dirty="0"/>
+          </a:p>
+          <a:p>
+            <a:pPr marL="133350" indent="0">
+              <a:buNone/>
+            </a:pPr>
+            <a:endParaRPr lang="ru-BY" b="1" dirty="0">
+              <a:latin typeface="+mn-lt"/>
+            </a:endParaRPr>
+          </a:p>
+          <a:p>
+            <a:pPr marL="133350" indent="0">
+              <a:buNone/>
+            </a:pPr>
+            <a:endParaRPr lang="ru-BY" b="1" dirty="0">
+              <a:latin typeface="+mn-lt"/>
+            </a:endParaRPr>
+          </a:p>
+          <a:p>
+            <a:pPr marL="133350" indent="0">
+              <a:buNone/>
+            </a:pPr>
+            <a:endParaRPr lang="ru-BY" b="1" dirty="0">
+              <a:latin typeface="+mn-lt"/>
+            </a:endParaRPr>
+          </a:p>
+          <a:p>
+            <a:pPr marL="133350" indent="0">
+              <a:buNone/>
+            </a:pPr>
+            <a:endParaRPr lang="ru-BY" b="1" dirty="0">
+              <a:latin typeface="+mn-lt"/>
+            </a:endParaRPr>
+          </a:p>
+          <a:p>
+            <a:pPr marL="133350" indent="0">
+              <a:buNone/>
+            </a:pPr>
+            <a:endParaRPr lang="ru-BY" b="1" dirty="0">
+              <a:latin typeface="+mn-lt"/>
+            </a:endParaRPr>
+          </a:p>
+          <a:p>
+            <a:pPr marL="133350" indent="0">
+              <a:buNone/>
+            </a:pPr>
+            <a:r>
+              <a:rPr lang="ru-BY" dirty="0">
+                <a:latin typeface="+mn-lt"/>
+              </a:rPr>
+              <a:t>Данные разделены по времени в пропорции: </a:t>
+            </a:r>
+          </a:p>
+          <a:p>
+            <a:pPr marL="133350" indent="0">
+              <a:buNone/>
+            </a:pPr>
+            <a:r>
+              <a:rPr lang="ru-BY" b="1" dirty="0">
+                <a:latin typeface="+mn-lt"/>
+              </a:rPr>
+              <a:t>60% (</a:t>
+            </a:r>
+            <a:r>
+              <a:rPr lang="es-419" b="1" dirty="0">
+                <a:latin typeface="+mn-lt"/>
+              </a:rPr>
+              <a:t>train</a:t>
+            </a:r>
+            <a:r>
+              <a:rPr lang="ru-RU" b="1" dirty="0">
+                <a:latin typeface="+mn-lt"/>
+              </a:rPr>
+              <a:t>)</a:t>
+            </a:r>
+            <a:r>
+              <a:rPr lang="ru-BY" b="1" dirty="0">
+                <a:latin typeface="+mn-lt"/>
+              </a:rPr>
+              <a:t> </a:t>
+            </a:r>
+            <a:r>
+              <a:rPr lang="ru-BY" dirty="0">
+                <a:latin typeface="+mn-lt"/>
+              </a:rPr>
+              <a:t>- обучающая выборка </a:t>
+            </a:r>
+          </a:p>
+          <a:p>
+            <a:pPr marL="133350" indent="0">
+              <a:buNone/>
+            </a:pPr>
+            <a:r>
+              <a:rPr lang="ru-BY" b="1" dirty="0">
+                <a:latin typeface="+mn-lt"/>
+              </a:rPr>
+              <a:t>20% (val) </a:t>
+            </a:r>
+            <a:r>
+              <a:rPr lang="ru-BY" dirty="0">
+                <a:latin typeface="+mn-lt"/>
+              </a:rPr>
+              <a:t>-</a:t>
+            </a:r>
+            <a:r>
+              <a:rPr lang="en-US" dirty="0">
+                <a:latin typeface="+mn-lt"/>
+              </a:rPr>
+              <a:t> </a:t>
+            </a:r>
+            <a:r>
+              <a:rPr lang="ru-RU" dirty="0">
+                <a:latin typeface="+mn-lt"/>
+              </a:rPr>
+              <a:t>для подбора настроек и выбор лучшей модели</a:t>
+            </a:r>
+            <a:r>
+              <a:rPr lang="ru-BY" dirty="0">
+                <a:latin typeface="+mn-lt"/>
+              </a:rPr>
+              <a:t> </a:t>
+            </a:r>
+          </a:p>
+          <a:p>
+            <a:pPr marL="133350" indent="0">
+              <a:buNone/>
+            </a:pPr>
+            <a:r>
+              <a:rPr lang="ru-BY" b="1" dirty="0">
+                <a:latin typeface="+mn-lt"/>
+              </a:rPr>
+              <a:t>20%</a:t>
+            </a:r>
+            <a:r>
+              <a:rPr lang="en-US" b="1" dirty="0">
+                <a:latin typeface="+mn-lt"/>
+              </a:rPr>
+              <a:t> (test)</a:t>
+            </a:r>
+            <a:r>
+              <a:rPr lang="ru-BY" b="1" dirty="0">
+                <a:latin typeface="+mn-lt"/>
+              </a:rPr>
+              <a:t> </a:t>
+            </a:r>
+            <a:r>
+              <a:rPr lang="ru-BY" dirty="0">
+                <a:latin typeface="+mn-lt"/>
+              </a:rPr>
+              <a:t>-</a:t>
+            </a:r>
+            <a:r>
+              <a:rPr lang="en-US" dirty="0">
+                <a:latin typeface="+mn-lt"/>
+              </a:rPr>
+              <a:t> </a:t>
+            </a:r>
+            <a:r>
+              <a:rPr lang="en-US" dirty="0" err="1">
+                <a:latin typeface="+mn-lt"/>
+              </a:rPr>
+              <a:t>данные</a:t>
+            </a:r>
+            <a:r>
+              <a:rPr lang="ru-RU" dirty="0">
+                <a:latin typeface="+mn-lt"/>
+              </a:rPr>
+              <a:t> для финальной проверки; в обучении и выборе победителя не участвуют.</a:t>
+            </a:r>
+            <a:endParaRPr lang="ru-BY" dirty="0">
+              <a:latin typeface="+mn-lt"/>
+            </a:endParaRPr>
           </a:p>
         </p:txBody>
       </p:sp>
@@ -13681,15 +14345,15 @@
           <p:nvPr/>
         </p:nvPicPr>
         <p:blipFill>
-          <a:blip r:embed="rId2"/>
+          <a:blip r:embed="rId3"/>
           <a:stretch>
             <a:fillRect/>
           </a:stretch>
         </p:blipFill>
         <p:spPr>
           <a:xfrm>
-            <a:off x="2360550" y="3012027"/>
-            <a:ext cx="4800600" cy="1409700"/>
+            <a:off x="2594919" y="2450990"/>
+            <a:ext cx="4310858" cy="1265887"/>
           </a:xfrm>
           <a:prstGeom prst="rect">
             <a:avLst/>
@@ -13731,7 +14395,7 @@
           <p:cNvPr id="2" name="Заголовок 1">
             <a:extLst>
               <a:ext uri="{FF2B5EF4-FFF2-40B4-BE49-F238E27FC236}">
-                <a16:creationId xmlns:a16="http://schemas.microsoft.com/office/drawing/2014/main" id="{1EDC1EFA-7DAA-82F3-7D5D-95B5BB3BDBE9}"/>
+                <a16:creationId xmlns:a16="http://schemas.microsoft.com/office/drawing/2014/main" id="{FD05C08C-46C8-C68E-54C0-BF2580217F54}"/>
               </a:ext>
             </a:extLst>
           </p:cNvPr>
@@ -13747,7 +14411,10 @@
           <a:bodyPr/>
           <a:lstStyle/>
           <a:p>
-            <a:endParaRPr lang="ru-BY"/>
+            <a:r>
+              <a:rPr lang="ru-BY" dirty="0"/>
+              <a:t>Модели</a:t>
+            </a:r>
           </a:p>
         </p:txBody>
       </p:sp>
@@ -13756,7 +14423,7 @@
           <p:cNvPr id="3" name="Текст 2">
             <a:extLst>
               <a:ext uri="{FF2B5EF4-FFF2-40B4-BE49-F238E27FC236}">
-                <a16:creationId xmlns:a16="http://schemas.microsoft.com/office/drawing/2014/main" id="{082D0B97-BB46-1DB4-C3B0-AECA60F3BD36}"/>
+                <a16:creationId xmlns:a16="http://schemas.microsoft.com/office/drawing/2014/main" id="{4E4EFA2D-99D9-F93B-C626-C3BC32CD95B5}"/>
               </a:ext>
             </a:extLst>
           </p:cNvPr>
@@ -13769,9 +14436,158 @@
         </p:nvSpPr>
         <p:spPr/>
         <p:txBody>
-          <a:bodyPr/>
+          <a:bodyPr>
+            <a:normAutofit/>
+          </a:bodyPr>
           <a:lstStyle/>
           <a:p>
+            <a:pPr marL="133350" indent="0">
+              <a:buNone/>
+            </a:pPr>
+            <a:r>
+              <a:rPr lang="ru-RU" dirty="0"/>
+              <a:t>4 варианта </a:t>
+            </a:r>
+            <a:r>
+              <a:rPr lang="es-419" dirty="0"/>
+              <a:t>LogReg: </a:t>
+            </a:r>
+            <a:r>
+              <a:rPr lang="ru-RU" dirty="0"/>
+              <a:t>без регуляризации, </a:t>
+            </a:r>
+            <a:r>
+              <a:rPr lang="es-419" dirty="0"/>
+              <a:t>L2, L1, ElasticNet</a:t>
+            </a:r>
+          </a:p>
+          <a:p>
+            <a:r>
+              <a:rPr lang="ru-RU" dirty="0"/>
+              <a:t>для </a:t>
+            </a:r>
+            <a:r>
+              <a:rPr lang="es-419" dirty="0"/>
+              <a:t>L2 / L1 / ElasticNet: </a:t>
+            </a:r>
+            <a:r>
+              <a:rPr lang="ru-RU" dirty="0"/>
+              <a:t>подбор </a:t>
+            </a:r>
+            <a:r>
+              <a:rPr lang="ru-RU" dirty="0" err="1"/>
+              <a:t>гиперпараметров</a:t>
+            </a:r>
+            <a:r>
+              <a:rPr lang="ru-RU" dirty="0"/>
+              <a:t> на </a:t>
+            </a:r>
+            <a:r>
+              <a:rPr lang="es-419" dirty="0"/>
+              <a:t>train </a:t>
+            </a:r>
+            <a:r>
+              <a:rPr lang="ru-RU" dirty="0"/>
+              <a:t>через </a:t>
+            </a:r>
+            <a:r>
+              <a:rPr lang="es-419" dirty="0"/>
+              <a:t>GridSearchCV </a:t>
+            </a:r>
+            <a:endParaRPr lang="ru-RU" dirty="0"/>
+          </a:p>
+          <a:p>
+            <a:r>
+              <a:rPr lang="es-419" dirty="0"/>
+              <a:t>CV=3, </a:t>
+            </a:r>
+            <a:r>
+              <a:rPr lang="ru-RU" dirty="0">
+                <a:latin typeface="+mn-lt"/>
+              </a:rPr>
+              <a:t>критерий</a:t>
+            </a:r>
+            <a:r>
+              <a:rPr lang="ru-RU" dirty="0"/>
+              <a:t> — </a:t>
+            </a:r>
+            <a:r>
+              <a:rPr lang="es-419" dirty="0"/>
+              <a:t>average precision</a:t>
+            </a:r>
+          </a:p>
+          <a:p>
+            <a:r>
+              <a:rPr lang="ru-RU" dirty="0"/>
+              <a:t>сила регуляризации </a:t>
+            </a:r>
+            <a:r>
+              <a:rPr lang="es-419" dirty="0"/>
+              <a:t>C: </a:t>
+            </a:r>
+            <a:r>
+              <a:rPr lang="ru-RU" dirty="0"/>
+              <a:t>от 0.001 до 100 </a:t>
+            </a:r>
+            <a:endParaRPr lang="es-419" dirty="0"/>
+          </a:p>
+          <a:p>
+            <a:r>
+              <a:rPr lang="ru-RU" dirty="0"/>
+              <a:t>у </a:t>
+            </a:r>
+            <a:r>
+              <a:rPr lang="es-419" dirty="0"/>
+              <a:t>ElasticNet </a:t>
+            </a:r>
+            <a:r>
+              <a:rPr lang="ru-RU" dirty="0"/>
+              <a:t>дополнительно доля </a:t>
+            </a:r>
+            <a:r>
+              <a:rPr lang="es-419" dirty="0"/>
+              <a:t>L1: 0.1, 0.3, 0.5, 0.7, 0.9</a:t>
+            </a:r>
+          </a:p>
+          <a:p>
+            <a:pPr marL="133350" indent="0">
+              <a:buNone/>
+            </a:pPr>
+            <a:endParaRPr lang="ru-RU" dirty="0"/>
+          </a:p>
+          <a:p>
+            <a:pPr marL="133350" indent="0">
+              <a:buNone/>
+            </a:pPr>
+            <a:r>
+              <a:rPr lang="ru-RU" dirty="0"/>
+              <a:t>Итог подбора: у </a:t>
+            </a:r>
+            <a:r>
+              <a:rPr lang="es-419" dirty="0"/>
+              <a:t>L2 </a:t>
+            </a:r>
+            <a:r>
+              <a:rPr lang="ru-RU" dirty="0"/>
+              <a:t>и </a:t>
+            </a:r>
+            <a:r>
+              <a:rPr lang="es-419" dirty="0"/>
+              <a:t>L1 — C=0.001; </a:t>
+            </a:r>
+            <a:r>
+              <a:rPr lang="ru-RU" dirty="0"/>
+              <a:t>у </a:t>
+            </a:r>
+            <a:r>
+              <a:rPr lang="es-419" dirty="0"/>
+              <a:t>ElasticNet — C=0.001, l1_ratio=0.9</a:t>
+            </a:r>
+          </a:p>
+          <a:p>
+            <a:pPr marL="133350" indent="0">
+              <a:buNone/>
+            </a:pPr>
             <a:endParaRPr lang="ru-BY" dirty="0"/>
           </a:p>
         </p:txBody>
@@ -13779,7 +14595,7 @@
     </p:spTree>
     <p:extLst>
       <p:ext uri="{BB962C8B-B14F-4D97-AF65-F5344CB8AC3E}">
-        <p14:creationId xmlns:p14="http://schemas.microsoft.com/office/powerpoint/2010/main" val="4148219353"/>
+        <p14:creationId xmlns:p14="http://schemas.microsoft.com/office/powerpoint/2010/main" val="3606293043"/>
       </p:ext>
     </p:extLst>
   </p:cSld>
@@ -13794,7 +14610,7 @@
   <p:cSld>
     <p:spTree>
       <p:nvGrpSpPr>
-        <p:cNvPr id="1" name="Shape 211"/>
+        <p:cNvPr id="1" name=""/>
         <p:cNvGrpSpPr/>
         <p:nvPr/>
       </p:nvGrpSpPr>
@@ -13808,1073 +14624,168 @@
       </p:grpSpPr>
       <p:sp>
         <p:nvSpPr>
-          <p:cNvPr id="212" name="Google Shape;212;p42"/>
-          <p:cNvSpPr txBox="1">
+          <p:cNvPr id="2" name="Заголовок 1">
+            <a:extLst>
+              <a:ext uri="{FF2B5EF4-FFF2-40B4-BE49-F238E27FC236}">
+                <a16:creationId xmlns:a16="http://schemas.microsoft.com/office/drawing/2014/main" id="{068762DD-B692-B618-5CD9-C48BED09E4FC}"/>
+              </a:ext>
+            </a:extLst>
+          </p:cNvPr>
+          <p:cNvSpPr>
             <a:spLocks noGrp="1"/>
           </p:cNvSpPr>
           <p:nvPr>
             <p:ph type="title"/>
           </p:nvPr>
         </p:nvSpPr>
+        <p:spPr/>
+        <p:txBody>
+          <a:bodyPr/>
+          <a:lstStyle/>
+          <a:p>
+            <a:r>
+              <a:rPr lang="ru-BY" dirty="0">
+                <a:latin typeface="+mn-lt"/>
+              </a:rPr>
+              <a:t>Модели</a:t>
+            </a:r>
+          </a:p>
+        </p:txBody>
+      </p:sp>
+      <p:sp>
+        <p:nvSpPr>
+          <p:cNvPr id="3" name="Текст 2">
+            <a:extLst>
+              <a:ext uri="{FF2B5EF4-FFF2-40B4-BE49-F238E27FC236}">
+                <a16:creationId xmlns:a16="http://schemas.microsoft.com/office/drawing/2014/main" id="{60016D71-746E-08D9-2F07-7855C3B6A657}"/>
+              </a:ext>
+            </a:extLst>
+          </p:cNvPr>
+          <p:cNvSpPr>
+            <a:spLocks noGrp="1"/>
+          </p:cNvSpPr>
+          <p:nvPr>
+            <p:ph type="body" idx="1"/>
+          </p:nvPr>
+        </p:nvSpPr>
         <p:spPr>
           <a:xfrm>
-            <a:off x="500550" y="330724"/>
-            <a:ext cx="8520600" cy="1095900"/>
+            <a:off x="500550" y="1105193"/>
+            <a:ext cx="8520600" cy="3416400"/>
           </a:xfrm>
-          <a:prstGeom prst="rect">
-            <a:avLst/>
-          </a:prstGeom>
         </p:spPr>
         <p:txBody>
-          <a:bodyPr spcFirstLastPara="1" wrap="square" lIns="91425" tIns="91425" rIns="91425" bIns="91425" anchor="t" anchorCtr="0">
-            <a:noAutofit/>
+          <a:bodyPr>
+            <a:normAutofit/>
           </a:bodyPr>
           <a:lstStyle/>
           <a:p>
-            <a:pPr marL="0" lvl="0" indent="0" algn="l" rtl="0">
-              <a:spcBef>
-                <a:spcPts val="0"/>
-              </a:spcBef>
-              <a:spcAft>
-                <a:spcPts val="0"/>
-              </a:spcAft>
+            <a:pPr marL="133350" indent="0">
               <a:buNone/>
             </a:pPr>
             <a:r>
-              <a:rPr lang="ru" sz="3400"/>
-              <a:t>Выводы</a:t>
+              <a:rPr lang="es-419" b="1" dirty="0"/>
+              <a:t>CatBoost</a:t>
             </a:r>
-            <a:endParaRPr sz="3000"/>
+            <a:r>
+              <a:rPr lang="es-419" dirty="0"/>
+              <a:t>: </a:t>
+            </a:r>
+            <a:r>
+              <a:rPr lang="ru-RU" dirty="0"/>
+              <a:t>категории подаются напрямую</a:t>
+            </a:r>
           </a:p>
           <a:p>
-            <a:pPr marL="0" lvl="0" indent="0" algn="l" rtl="0">
-              <a:spcBef>
-                <a:spcPts val="0"/>
-              </a:spcBef>
-              <a:spcAft>
-                <a:spcPts val="0"/>
-              </a:spcAft>
+            <a:r>
+              <a:rPr lang="ru-RU" dirty="0"/>
+              <a:t>перебор сетки: </a:t>
+            </a:r>
+            <a:r>
+              <a:rPr lang="es-419" dirty="0"/>
+              <a:t>depth 4 </a:t>
+            </a:r>
+            <a:r>
+              <a:rPr lang="ru-RU" dirty="0"/>
+              <a:t>и 6; </a:t>
+            </a:r>
+            <a:r>
+              <a:rPr lang="es-419" dirty="0"/>
+              <a:t>learning_rate 0.03, 0.05, 0.1; l2_leaf_reg 1, 3, 10 (</a:t>
+            </a:r>
+            <a:r>
+              <a:rPr lang="ru-RU" dirty="0"/>
+              <a:t>всего 18 комбинаций) </a:t>
+            </a:r>
+          </a:p>
+          <a:p>
+            <a:r>
+              <a:rPr lang="es-419" dirty="0"/>
+              <a:t>early stopping: </a:t>
+            </a:r>
+            <a:r>
+              <a:rPr lang="ru-RU" dirty="0"/>
+              <a:t>максимум 500 итераций, остановка если 50 итераций без улучшения на </a:t>
+            </a:r>
+            <a:r>
+              <a:rPr lang="es-419" dirty="0"/>
+              <a:t>val </a:t>
+            </a:r>
+            <a:endParaRPr lang="ru-RU" dirty="0"/>
+          </a:p>
+          <a:p>
+            <a:endParaRPr lang="ru-RU" dirty="0"/>
+          </a:p>
+          <a:p>
+            <a:pPr marL="133350" indent="0" algn="ctr">
               <a:buNone/>
             </a:pPr>
-            <a:endParaRPr sz="3000"/>
+            <a:r>
+              <a:rPr lang="ru-RU" dirty="0"/>
+              <a:t>Итоговые значения для модели </a:t>
+            </a:r>
+            <a:r>
+              <a:rPr lang="es-419" dirty="0"/>
+              <a:t>depth=6, learning_rate=0.1, l2_leaf_reg=10, best_iteration=12</a:t>
+            </a:r>
+            <a:endParaRPr lang="ru-RU" dirty="0"/>
+          </a:p>
+          <a:p>
+            <a:pPr marL="133350" indent="0" algn="ctr">
+              <a:buNone/>
+            </a:pPr>
+            <a:endParaRPr lang="ru-RU" dirty="0">
+              <a:latin typeface="+mn-lt"/>
+            </a:endParaRPr>
+          </a:p>
+          <a:p>
+            <a:pPr marL="133350" indent="0" algn="ctr">
+              <a:buNone/>
+            </a:pPr>
+            <a:r>
+              <a:rPr lang="ru-RU" dirty="0"/>
+              <a:t>У всех моделей использовалась балансировка классов (для компенсации редкости “</a:t>
+            </a:r>
+            <a:r>
+              <a:rPr lang="es-419" dirty="0"/>
+              <a:t>yes”) </a:t>
+            </a:r>
+            <a:br>
+              <a:rPr lang="es-419" dirty="0"/>
+            </a:br>
+            <a:endParaRPr lang="es-419" dirty="0"/>
+          </a:p>
+          <a:p>
+            <a:endParaRPr lang="ru-BY" dirty="0"/>
           </a:p>
         </p:txBody>
       </p:sp>
-      <p:graphicFrame>
-        <p:nvGraphicFramePr>
-          <p:cNvPr id="213" name="Google Shape;213;p42"/>
-          <p:cNvGraphicFramePr/>
-          <p:nvPr/>
-        </p:nvGraphicFramePr>
-        <p:xfrm>
-          <a:off x="952500" y="1718400"/>
-          <a:ext cx="3000000" cy="3000000"/>
-        </p:xfrm>
-        <a:graphic>
-          <a:graphicData uri="http://schemas.openxmlformats.org/drawingml/2006/table">
-            <a:tbl>
-              <a:tblPr>
-                <a:noFill/>
-                <a:tableStyleId>{89122108-2A36-42DF-A35F-760401D71D52}</a:tableStyleId>
-              </a:tblPr>
-              <a:tblGrid>
-                <a:gridCol w="489425">
-                  <a:extLst>
-                    <a:ext uri="{9D8B030D-6E8A-4147-A177-3AD203B41FA5}">
-                      <a16:colId xmlns:a16="http://schemas.microsoft.com/office/drawing/2014/main" val="20000"/>
-                    </a:ext>
-                  </a:extLst>
-                </a:gridCol>
-                <a:gridCol w="6749575">
-                  <a:extLst>
-                    <a:ext uri="{9D8B030D-6E8A-4147-A177-3AD203B41FA5}">
-                      <a16:colId xmlns:a16="http://schemas.microsoft.com/office/drawing/2014/main" val="20001"/>
-                    </a:ext>
-                  </a:extLst>
-                </a:gridCol>
-              </a:tblGrid>
-              <a:tr h="381000">
-                <a:tc>
-                  <a:txBody>
-                    <a:bodyPr/>
-                    <a:lstStyle/>
-                    <a:p>
-                      <a:pPr marL="0" lvl="0" indent="0" algn="l" rtl="0">
-                        <a:spcBef>
-                          <a:spcPts val="0"/>
-                        </a:spcBef>
-                        <a:spcAft>
-                          <a:spcPts val="0"/>
-                        </a:spcAft>
-                        <a:buNone/>
-                      </a:pPr>
-                      <a:r>
-                        <a:rPr lang="ru" sz="1600" b="1">
-                          <a:solidFill>
-                            <a:srgbClr val="3F299A"/>
-                          </a:solidFill>
-                          <a:latin typeface="Roboto"/>
-                          <a:ea typeface="Roboto"/>
-                          <a:cs typeface="Roboto"/>
-                          <a:sym typeface="Roboto"/>
-                        </a:rPr>
-                        <a:t>1.</a:t>
-                      </a:r>
-                      <a:endParaRPr sz="1600" b="1">
-                        <a:solidFill>
-                          <a:srgbClr val="3F299A"/>
-                        </a:solidFill>
-                        <a:latin typeface="Roboto"/>
-                        <a:ea typeface="Roboto"/>
-                        <a:cs typeface="Roboto"/>
-                        <a:sym typeface="Roboto"/>
-                      </a:endParaRPr>
-                    </a:p>
-                  </a:txBody>
-                  <a:tcPr marL="198000" marR="91425" marT="91425" marB="91425">
-                    <a:lnL w="9525" cap="flat" cmpd="sng">
-                      <a:solidFill>
-                        <a:srgbClr val="BFC1F0">
-                          <a:alpha val="0"/>
-                        </a:srgbClr>
-                      </a:solidFill>
-                      <a:prstDash val="solid"/>
-                      <a:round/>
-                      <a:headEnd type="none" w="sm" len="sm"/>
-                      <a:tailEnd type="none" w="sm" len="sm"/>
-                    </a:lnL>
-                    <a:lnR w="9525" cap="flat" cmpd="sng">
-                      <a:solidFill>
-                        <a:srgbClr val="FFFFFF">
-                          <a:alpha val="0"/>
-                        </a:srgbClr>
-                      </a:solidFill>
-                      <a:prstDash val="solid"/>
-                      <a:round/>
-                      <a:headEnd type="none" w="sm" len="sm"/>
-                      <a:tailEnd type="none" w="sm" len="sm"/>
-                    </a:lnR>
-                    <a:lnT w="9525" cap="flat" cmpd="sng">
-                      <a:solidFill>
-                        <a:srgbClr val="BFC1F0">
-                          <a:alpha val="0"/>
-                        </a:srgbClr>
-                      </a:solidFill>
-                      <a:prstDash val="solid"/>
-                      <a:round/>
-                      <a:headEnd type="none" w="sm" len="sm"/>
-                      <a:tailEnd type="none" w="sm" len="sm"/>
-                    </a:lnT>
-                    <a:lnB w="9525" cap="flat" cmpd="sng">
-                      <a:solidFill>
-                        <a:srgbClr val="BFC1F0">
-                          <a:alpha val="0"/>
-                        </a:srgbClr>
-                      </a:solidFill>
-                      <a:prstDash val="solid"/>
-                      <a:round/>
-                      <a:headEnd type="none" w="sm" len="sm"/>
-                      <a:tailEnd type="none" w="sm" len="sm"/>
-                    </a:lnB>
-                  </a:tcPr>
-                </a:tc>
-                <a:tc>
-                  <a:txBody>
-                    <a:bodyPr/>
-                    <a:lstStyle/>
-                    <a:p>
-                      <a:pPr marL="0" lvl="0" indent="0" algn="l" rtl="0">
-                        <a:lnSpc>
-                          <a:spcPct val="115000"/>
-                        </a:lnSpc>
-                        <a:spcBef>
-                          <a:spcPts val="0"/>
-                        </a:spcBef>
-                        <a:spcAft>
-                          <a:spcPts val="0"/>
-                        </a:spcAft>
-                        <a:buNone/>
-                      </a:pPr>
-                      <a:endParaRPr sz="1600">
-                        <a:solidFill>
-                          <a:srgbClr val="9857F3"/>
-                        </a:solidFill>
-                        <a:latin typeface="Roboto"/>
-                        <a:ea typeface="Roboto"/>
-                        <a:cs typeface="Roboto"/>
-                        <a:sym typeface="Roboto"/>
-                      </a:endParaRPr>
-                    </a:p>
-                  </a:txBody>
-                  <a:tcPr marL="198000" marR="91425" marT="91425" marB="91425">
-                    <a:lnL w="9525" cap="flat" cmpd="sng">
-                      <a:solidFill>
-                        <a:srgbClr val="FFFFFF">
-                          <a:alpha val="0"/>
-                        </a:srgbClr>
-                      </a:solidFill>
-                      <a:prstDash val="solid"/>
-                      <a:round/>
-                      <a:headEnd type="none" w="sm" len="sm"/>
-                      <a:tailEnd type="none" w="sm" len="sm"/>
-                    </a:lnL>
-                    <a:lnR w="9525" cap="flat" cmpd="sng">
-                      <a:solidFill>
-                        <a:srgbClr val="BFC1F0">
-                          <a:alpha val="0"/>
-                        </a:srgbClr>
-                      </a:solidFill>
-                      <a:prstDash val="solid"/>
-                      <a:round/>
-                      <a:headEnd type="none" w="sm" len="sm"/>
-                      <a:tailEnd type="none" w="sm" len="sm"/>
-                    </a:lnR>
-                    <a:lnT w="9525" cap="flat" cmpd="sng">
-                      <a:solidFill>
-                        <a:srgbClr val="BFC1F0">
-                          <a:alpha val="0"/>
-                        </a:srgbClr>
-                      </a:solidFill>
-                      <a:prstDash val="solid"/>
-                      <a:round/>
-                      <a:headEnd type="none" w="sm" len="sm"/>
-                      <a:tailEnd type="none" w="sm" len="sm"/>
-                    </a:lnT>
-                    <a:lnB w="9525" cap="flat" cmpd="sng">
-                      <a:solidFill>
-                        <a:srgbClr val="BFC1F0">
-                          <a:alpha val="0"/>
-                        </a:srgbClr>
-                      </a:solidFill>
-                      <a:prstDash val="solid"/>
-                      <a:round/>
-                      <a:headEnd type="none" w="sm" len="sm"/>
-                      <a:tailEnd type="none" w="sm" len="sm"/>
-                    </a:lnB>
-                  </a:tcPr>
-                </a:tc>
-                <a:extLst>
-                  <a:ext uri="{0D108BD9-81ED-4DB2-BD59-A6C34878D82A}">
-                    <a16:rowId xmlns:a16="http://schemas.microsoft.com/office/drawing/2014/main" val="10000"/>
-                  </a:ext>
-                </a:extLst>
-              </a:tr>
-              <a:tr h="381000">
-                <a:tc>
-                  <a:txBody>
-                    <a:bodyPr/>
-                    <a:lstStyle/>
-                    <a:p>
-                      <a:pPr marL="0" lvl="0" indent="0" algn="l" rtl="0">
-                        <a:spcBef>
-                          <a:spcPts val="0"/>
-                        </a:spcBef>
-                        <a:spcAft>
-                          <a:spcPts val="0"/>
-                        </a:spcAft>
-                        <a:buNone/>
-                      </a:pPr>
-                      <a:r>
-                        <a:rPr lang="ru" sz="1600" b="1">
-                          <a:solidFill>
-                            <a:srgbClr val="3F299A"/>
-                          </a:solidFill>
-                          <a:latin typeface="Roboto"/>
-                          <a:ea typeface="Roboto"/>
-                          <a:cs typeface="Roboto"/>
-                          <a:sym typeface="Roboto"/>
-                        </a:rPr>
-                        <a:t>2.</a:t>
-                      </a:r>
-                      <a:endParaRPr sz="1600" b="1">
-                        <a:solidFill>
-                          <a:srgbClr val="3F299A"/>
-                        </a:solidFill>
-                        <a:latin typeface="Roboto"/>
-                        <a:ea typeface="Roboto"/>
-                        <a:cs typeface="Roboto"/>
-                        <a:sym typeface="Roboto"/>
-                      </a:endParaRPr>
-                    </a:p>
-                  </a:txBody>
-                  <a:tcPr marL="198000" marR="91425" marT="91425" marB="91425">
-                    <a:lnL w="9525" cap="flat" cmpd="sng">
-                      <a:solidFill>
-                        <a:srgbClr val="BFC1F0">
-                          <a:alpha val="0"/>
-                        </a:srgbClr>
-                      </a:solidFill>
-                      <a:prstDash val="solid"/>
-                      <a:round/>
-                      <a:headEnd type="none" w="sm" len="sm"/>
-                      <a:tailEnd type="none" w="sm" len="sm"/>
-                    </a:lnL>
-                    <a:lnR w="9525" cap="flat" cmpd="sng">
-                      <a:solidFill>
-                        <a:srgbClr val="FFFFFF">
-                          <a:alpha val="0"/>
-                        </a:srgbClr>
-                      </a:solidFill>
-                      <a:prstDash val="solid"/>
-                      <a:round/>
-                      <a:headEnd type="none" w="sm" len="sm"/>
-                      <a:tailEnd type="none" w="sm" len="sm"/>
-                    </a:lnR>
-                    <a:lnT w="9525" cap="flat" cmpd="sng">
-                      <a:solidFill>
-                        <a:srgbClr val="BFC1F0">
-                          <a:alpha val="0"/>
-                        </a:srgbClr>
-                      </a:solidFill>
-                      <a:prstDash val="solid"/>
-                      <a:round/>
-                      <a:headEnd type="none" w="sm" len="sm"/>
-                      <a:tailEnd type="none" w="sm" len="sm"/>
-                    </a:lnT>
-                    <a:lnB w="9525" cap="flat" cmpd="sng">
-                      <a:solidFill>
-                        <a:srgbClr val="BFC1F0">
-                          <a:alpha val="0"/>
-                        </a:srgbClr>
-                      </a:solidFill>
-                      <a:prstDash val="solid"/>
-                      <a:round/>
-                      <a:headEnd type="none" w="sm" len="sm"/>
-                      <a:tailEnd type="none" w="sm" len="sm"/>
-                    </a:lnB>
-                  </a:tcPr>
-                </a:tc>
-                <a:tc>
-                  <a:txBody>
-                    <a:bodyPr/>
-                    <a:lstStyle/>
-                    <a:p>
-                      <a:pPr marL="0" lvl="0" indent="0" algn="l" rtl="0">
-                        <a:lnSpc>
-                          <a:spcPct val="115000"/>
-                        </a:lnSpc>
-                        <a:spcBef>
-                          <a:spcPts val="0"/>
-                        </a:spcBef>
-                        <a:spcAft>
-                          <a:spcPts val="0"/>
-                        </a:spcAft>
-                        <a:buNone/>
-                      </a:pPr>
-                      <a:endParaRPr sz="1600">
-                        <a:solidFill>
-                          <a:srgbClr val="9857F3"/>
-                        </a:solidFill>
-                        <a:latin typeface="Roboto"/>
-                        <a:ea typeface="Roboto"/>
-                        <a:cs typeface="Roboto"/>
-                        <a:sym typeface="Roboto"/>
-                      </a:endParaRPr>
-                    </a:p>
-                  </a:txBody>
-                  <a:tcPr marL="198000" marR="91425" marT="91425" marB="91425">
-                    <a:lnL w="9525" cap="flat" cmpd="sng">
-                      <a:solidFill>
-                        <a:srgbClr val="FFFFFF">
-                          <a:alpha val="0"/>
-                        </a:srgbClr>
-                      </a:solidFill>
-                      <a:prstDash val="solid"/>
-                      <a:round/>
-                      <a:headEnd type="none" w="sm" len="sm"/>
-                      <a:tailEnd type="none" w="sm" len="sm"/>
-                    </a:lnL>
-                    <a:lnR w="9525" cap="flat" cmpd="sng">
-                      <a:solidFill>
-                        <a:srgbClr val="BFC1F0">
-                          <a:alpha val="0"/>
-                        </a:srgbClr>
-                      </a:solidFill>
-                      <a:prstDash val="solid"/>
-                      <a:round/>
-                      <a:headEnd type="none" w="sm" len="sm"/>
-                      <a:tailEnd type="none" w="sm" len="sm"/>
-                    </a:lnR>
-                    <a:lnT w="9525" cap="flat" cmpd="sng">
-                      <a:solidFill>
-                        <a:srgbClr val="BFC1F0">
-                          <a:alpha val="0"/>
-                        </a:srgbClr>
-                      </a:solidFill>
-                      <a:prstDash val="solid"/>
-                      <a:round/>
-                      <a:headEnd type="none" w="sm" len="sm"/>
-                      <a:tailEnd type="none" w="sm" len="sm"/>
-                    </a:lnT>
-                    <a:lnB w="9525" cap="flat" cmpd="sng">
-                      <a:solidFill>
-                        <a:srgbClr val="BFC1F0">
-                          <a:alpha val="0"/>
-                        </a:srgbClr>
-                      </a:solidFill>
-                      <a:prstDash val="solid"/>
-                      <a:round/>
-                      <a:headEnd type="none" w="sm" len="sm"/>
-                      <a:tailEnd type="none" w="sm" len="sm"/>
-                    </a:lnB>
-                  </a:tcPr>
-                </a:tc>
-                <a:extLst>
-                  <a:ext uri="{0D108BD9-81ED-4DB2-BD59-A6C34878D82A}">
-                    <a16:rowId xmlns:a16="http://schemas.microsoft.com/office/drawing/2014/main" val="10001"/>
-                  </a:ext>
-                </a:extLst>
-              </a:tr>
-              <a:tr h="381000">
-                <a:tc>
-                  <a:txBody>
-                    <a:bodyPr/>
-                    <a:lstStyle/>
-                    <a:p>
-                      <a:pPr marL="0" lvl="0" indent="0" algn="l" rtl="0">
-                        <a:spcBef>
-                          <a:spcPts val="0"/>
-                        </a:spcBef>
-                        <a:spcAft>
-                          <a:spcPts val="0"/>
-                        </a:spcAft>
-                        <a:buNone/>
-                      </a:pPr>
-                      <a:r>
-                        <a:rPr lang="ru" sz="1600" b="1">
-                          <a:solidFill>
-                            <a:srgbClr val="3F299A"/>
-                          </a:solidFill>
-                          <a:latin typeface="Roboto"/>
-                          <a:ea typeface="Roboto"/>
-                          <a:cs typeface="Roboto"/>
-                          <a:sym typeface="Roboto"/>
-                        </a:rPr>
-                        <a:t>3.</a:t>
-                      </a:r>
-                      <a:endParaRPr sz="1600" b="1">
-                        <a:solidFill>
-                          <a:srgbClr val="3F299A"/>
-                        </a:solidFill>
-                        <a:latin typeface="Roboto"/>
-                        <a:ea typeface="Roboto"/>
-                        <a:cs typeface="Roboto"/>
-                        <a:sym typeface="Roboto"/>
-                      </a:endParaRPr>
-                    </a:p>
-                  </a:txBody>
-                  <a:tcPr marL="198000" marR="91425" marT="91425" marB="91425">
-                    <a:lnL w="9525" cap="flat" cmpd="sng">
-                      <a:solidFill>
-                        <a:srgbClr val="BFC1F0">
-                          <a:alpha val="0"/>
-                        </a:srgbClr>
-                      </a:solidFill>
-                      <a:prstDash val="solid"/>
-                      <a:round/>
-                      <a:headEnd type="none" w="sm" len="sm"/>
-                      <a:tailEnd type="none" w="sm" len="sm"/>
-                    </a:lnL>
-                    <a:lnR w="9525" cap="flat" cmpd="sng">
-                      <a:solidFill>
-                        <a:srgbClr val="FFFFFF">
-                          <a:alpha val="0"/>
-                        </a:srgbClr>
-                      </a:solidFill>
-                      <a:prstDash val="solid"/>
-                      <a:round/>
-                      <a:headEnd type="none" w="sm" len="sm"/>
-                      <a:tailEnd type="none" w="sm" len="sm"/>
-                    </a:lnR>
-                    <a:lnT w="9525" cap="flat" cmpd="sng">
-                      <a:solidFill>
-                        <a:srgbClr val="BFC1F0">
-                          <a:alpha val="0"/>
-                        </a:srgbClr>
-                      </a:solidFill>
-                      <a:prstDash val="solid"/>
-                      <a:round/>
-                      <a:headEnd type="none" w="sm" len="sm"/>
-                      <a:tailEnd type="none" w="sm" len="sm"/>
-                    </a:lnT>
-                    <a:lnB w="9525" cap="flat" cmpd="sng">
-                      <a:solidFill>
-                        <a:srgbClr val="BFC1F0">
-                          <a:alpha val="0"/>
-                        </a:srgbClr>
-                      </a:solidFill>
-                      <a:prstDash val="solid"/>
-                      <a:round/>
-                      <a:headEnd type="none" w="sm" len="sm"/>
-                      <a:tailEnd type="none" w="sm" len="sm"/>
-                    </a:lnB>
-                  </a:tcPr>
-                </a:tc>
-                <a:tc>
-                  <a:txBody>
-                    <a:bodyPr/>
-                    <a:lstStyle/>
-                    <a:p>
-                      <a:pPr marL="0" lvl="0" indent="0" algn="l" rtl="0">
-                        <a:lnSpc>
-                          <a:spcPct val="115000"/>
-                        </a:lnSpc>
-                        <a:spcBef>
-                          <a:spcPts val="0"/>
-                        </a:spcBef>
-                        <a:spcAft>
-                          <a:spcPts val="0"/>
-                        </a:spcAft>
-                        <a:buNone/>
-                      </a:pPr>
-                      <a:endParaRPr sz="1600">
-                        <a:solidFill>
-                          <a:srgbClr val="9857F3"/>
-                        </a:solidFill>
-                        <a:latin typeface="Roboto"/>
-                        <a:ea typeface="Roboto"/>
-                        <a:cs typeface="Roboto"/>
-                        <a:sym typeface="Roboto"/>
-                      </a:endParaRPr>
-                    </a:p>
-                  </a:txBody>
-                  <a:tcPr marL="198000" marR="91425" marT="91425" marB="91425">
-                    <a:lnL w="9525" cap="flat" cmpd="sng">
-                      <a:solidFill>
-                        <a:srgbClr val="FFFFFF">
-                          <a:alpha val="0"/>
-                        </a:srgbClr>
-                      </a:solidFill>
-                      <a:prstDash val="solid"/>
-                      <a:round/>
-                      <a:headEnd type="none" w="sm" len="sm"/>
-                      <a:tailEnd type="none" w="sm" len="sm"/>
-                    </a:lnL>
-                    <a:lnR w="9525" cap="flat" cmpd="sng">
-                      <a:solidFill>
-                        <a:srgbClr val="BFC1F0">
-                          <a:alpha val="0"/>
-                        </a:srgbClr>
-                      </a:solidFill>
-                      <a:prstDash val="solid"/>
-                      <a:round/>
-                      <a:headEnd type="none" w="sm" len="sm"/>
-                      <a:tailEnd type="none" w="sm" len="sm"/>
-                    </a:lnR>
-                    <a:lnT w="9525" cap="flat" cmpd="sng">
-                      <a:solidFill>
-                        <a:srgbClr val="BFC1F0">
-                          <a:alpha val="0"/>
-                        </a:srgbClr>
-                      </a:solidFill>
-                      <a:prstDash val="solid"/>
-                      <a:round/>
-                      <a:headEnd type="none" w="sm" len="sm"/>
-                      <a:tailEnd type="none" w="sm" len="sm"/>
-                    </a:lnT>
-                    <a:lnB w="9525" cap="flat" cmpd="sng">
-                      <a:solidFill>
-                        <a:srgbClr val="BFC1F0">
-                          <a:alpha val="0"/>
-                        </a:srgbClr>
-                      </a:solidFill>
-                      <a:prstDash val="solid"/>
-                      <a:round/>
-                      <a:headEnd type="none" w="sm" len="sm"/>
-                      <a:tailEnd type="none" w="sm" len="sm"/>
-                    </a:lnB>
-                  </a:tcPr>
-                </a:tc>
-                <a:extLst>
-                  <a:ext uri="{0D108BD9-81ED-4DB2-BD59-A6C34878D82A}">
-                    <a16:rowId xmlns:a16="http://schemas.microsoft.com/office/drawing/2014/main" val="10002"/>
-                  </a:ext>
-                </a:extLst>
-              </a:tr>
-              <a:tr h="381000">
-                <a:tc>
-                  <a:txBody>
-                    <a:bodyPr/>
-                    <a:lstStyle/>
-                    <a:p>
-                      <a:pPr marL="0" lvl="0" indent="0" algn="l" rtl="0">
-                        <a:spcBef>
-                          <a:spcPts val="0"/>
-                        </a:spcBef>
-                        <a:spcAft>
-                          <a:spcPts val="0"/>
-                        </a:spcAft>
-                        <a:buNone/>
-                      </a:pPr>
-                      <a:endParaRPr/>
-                    </a:p>
-                  </a:txBody>
-                  <a:tcPr marL="198000" marR="91425" marT="91425" marB="91425">
-                    <a:lnL w="9525" cap="flat" cmpd="sng">
-                      <a:solidFill>
-                        <a:srgbClr val="BFC1F0">
-                          <a:alpha val="0"/>
-                        </a:srgbClr>
-                      </a:solidFill>
-                      <a:prstDash val="solid"/>
-                      <a:round/>
-                      <a:headEnd type="none" w="sm" len="sm"/>
-                      <a:tailEnd type="none" w="sm" len="sm"/>
-                    </a:lnL>
-                    <a:lnR w="9525" cap="flat" cmpd="sng">
-                      <a:solidFill>
-                        <a:srgbClr val="FFFFFF">
-                          <a:alpha val="0"/>
-                        </a:srgbClr>
-                      </a:solidFill>
-                      <a:prstDash val="solid"/>
-                      <a:round/>
-                      <a:headEnd type="none" w="sm" len="sm"/>
-                      <a:tailEnd type="none" w="sm" len="sm"/>
-                    </a:lnR>
-                    <a:lnT w="9525" cap="flat" cmpd="sng">
-                      <a:solidFill>
-                        <a:srgbClr val="BFC1F0">
-                          <a:alpha val="0"/>
-                        </a:srgbClr>
-                      </a:solidFill>
-                      <a:prstDash val="solid"/>
-                      <a:round/>
-                      <a:headEnd type="none" w="sm" len="sm"/>
-                      <a:tailEnd type="none" w="sm" len="sm"/>
-                    </a:lnT>
-                    <a:lnB w="9525" cap="flat" cmpd="sng">
-                      <a:solidFill>
-                        <a:srgbClr val="BFC1F0">
-                          <a:alpha val="0"/>
-                        </a:srgbClr>
-                      </a:solidFill>
-                      <a:prstDash val="solid"/>
-                      <a:round/>
-                      <a:headEnd type="none" w="sm" len="sm"/>
-                      <a:tailEnd type="none" w="sm" len="sm"/>
-                    </a:lnB>
-                  </a:tcPr>
-                </a:tc>
-                <a:tc>
-                  <a:txBody>
-                    <a:bodyPr/>
-                    <a:lstStyle/>
-                    <a:p>
-                      <a:pPr marL="0" lvl="0" indent="0" algn="l" rtl="0">
-                        <a:lnSpc>
-                          <a:spcPct val="115000"/>
-                        </a:lnSpc>
-                        <a:spcBef>
-                          <a:spcPts val="0"/>
-                        </a:spcBef>
-                        <a:spcAft>
-                          <a:spcPts val="0"/>
-                        </a:spcAft>
-                        <a:buNone/>
-                      </a:pPr>
-                      <a:endParaRPr sz="1600">
-                        <a:solidFill>
-                          <a:srgbClr val="9857F3"/>
-                        </a:solidFill>
-                        <a:latin typeface="Roboto"/>
-                        <a:ea typeface="Roboto"/>
-                        <a:cs typeface="Roboto"/>
-                        <a:sym typeface="Roboto"/>
-                      </a:endParaRPr>
-                    </a:p>
-                  </a:txBody>
-                  <a:tcPr marL="198000" marR="91425" marT="91425" marB="91425">
-                    <a:lnL w="9525" cap="flat" cmpd="sng">
-                      <a:solidFill>
-                        <a:srgbClr val="FFFFFF">
-                          <a:alpha val="0"/>
-                        </a:srgbClr>
-                      </a:solidFill>
-                      <a:prstDash val="solid"/>
-                      <a:round/>
-                      <a:headEnd type="none" w="sm" len="sm"/>
-                      <a:tailEnd type="none" w="sm" len="sm"/>
-                    </a:lnL>
-                    <a:lnR w="9525" cap="flat" cmpd="sng">
-                      <a:solidFill>
-                        <a:srgbClr val="BFC1F0">
-                          <a:alpha val="0"/>
-                        </a:srgbClr>
-                      </a:solidFill>
-                      <a:prstDash val="solid"/>
-                      <a:round/>
-                      <a:headEnd type="none" w="sm" len="sm"/>
-                      <a:tailEnd type="none" w="sm" len="sm"/>
-                    </a:lnR>
-                    <a:lnT w="9525" cap="flat" cmpd="sng">
-                      <a:solidFill>
-                        <a:srgbClr val="BFC1F0">
-                          <a:alpha val="0"/>
-                        </a:srgbClr>
-                      </a:solidFill>
-                      <a:prstDash val="solid"/>
-                      <a:round/>
-                      <a:headEnd type="none" w="sm" len="sm"/>
-                      <a:tailEnd type="none" w="sm" len="sm"/>
-                    </a:lnT>
-                    <a:lnB w="9525" cap="flat" cmpd="sng">
-                      <a:solidFill>
-                        <a:srgbClr val="BFC1F0">
-                          <a:alpha val="0"/>
-                        </a:srgbClr>
-                      </a:solidFill>
-                      <a:prstDash val="solid"/>
-                      <a:round/>
-                      <a:headEnd type="none" w="sm" len="sm"/>
-                      <a:tailEnd type="none" w="sm" len="sm"/>
-                    </a:lnB>
-                  </a:tcPr>
-                </a:tc>
-                <a:extLst>
-                  <a:ext uri="{0D108BD9-81ED-4DB2-BD59-A6C34878D82A}">
-                    <a16:rowId xmlns:a16="http://schemas.microsoft.com/office/drawing/2014/main" val="10003"/>
-                  </a:ext>
-                </a:extLst>
-              </a:tr>
-            </a:tbl>
-          </a:graphicData>
-        </a:graphic>
-      </p:graphicFrame>
-      <p:grpSp>
-        <p:nvGrpSpPr>
-          <p:cNvPr id="214" name="Google Shape;214;p42"/>
-          <p:cNvGrpSpPr/>
-          <p:nvPr/>
-        </p:nvGrpSpPr>
-        <p:grpSpPr>
-          <a:xfrm>
-            <a:off x="3633259" y="1248968"/>
-            <a:ext cx="5534664" cy="2335504"/>
-            <a:chOff x="4729635" y="887067"/>
-            <a:chExt cx="3375207" cy="1399343"/>
-          </a:xfrm>
-        </p:grpSpPr>
-        <p:pic>
-          <p:nvPicPr>
-            <p:cNvPr id="215" name="Google Shape;215;p42"/>
-            <p:cNvPicPr preferRelativeResize="0"/>
-            <p:nvPr/>
-          </p:nvPicPr>
-          <p:blipFill>
-            <a:blip r:embed="rId3">
-              <a:alphaModFix/>
-            </a:blip>
-            <a:stretch>
-              <a:fillRect/>
-            </a:stretch>
-          </p:blipFill>
-          <p:spPr>
-            <a:xfrm>
-              <a:off x="4729635" y="887067"/>
-              <a:ext cx="3375207" cy="1399343"/>
-            </a:xfrm>
-            <a:prstGeom prst="rect">
-              <a:avLst/>
-            </a:prstGeom>
-            <a:noFill/>
-            <a:ln>
-              <a:noFill/>
-            </a:ln>
-            <a:effectLst>
-              <a:outerShdw blurRad="200025" dist="28575" dir="4200000" algn="bl" rotWithShape="0">
-                <a:srgbClr val="000000">
-                  <a:alpha val="30000"/>
-                </a:srgbClr>
-              </a:outerShdw>
-            </a:effectLst>
-          </p:spPr>
-        </p:pic>
-        <p:sp>
-          <p:nvSpPr>
-            <p:cNvPr id="216" name="Google Shape;216;p42"/>
-            <p:cNvSpPr txBox="1"/>
-            <p:nvPr/>
-          </p:nvSpPr>
-          <p:spPr>
-            <a:xfrm>
-              <a:off x="5208319" y="1064138"/>
-              <a:ext cx="2869500" cy="1023600"/>
-            </a:xfrm>
-            <a:prstGeom prst="rect">
-              <a:avLst/>
-            </a:prstGeom>
-            <a:noFill/>
-            <a:ln>
-              <a:noFill/>
-            </a:ln>
-          </p:spPr>
-          <p:txBody>
-            <a:bodyPr spcFirstLastPara="1" wrap="square" lIns="91425" tIns="91425" rIns="91425" bIns="91425" anchor="t" anchorCtr="0">
-              <a:spAutoFit/>
-            </a:bodyPr>
-            <a:lstStyle/>
-            <a:p>
-              <a:pPr marL="0" lvl="0" indent="0" algn="l" rtl="0">
-                <a:spcBef>
-                  <a:spcPts val="0"/>
-                </a:spcBef>
-                <a:spcAft>
-                  <a:spcPts val="0"/>
-                </a:spcAft>
-                <a:buClr>
-                  <a:schemeClr val="dk1"/>
-                </a:buClr>
-                <a:buSzPts val="1100"/>
-                <a:buFont typeface="Arial"/>
-                <a:buNone/>
-              </a:pPr>
-              <a:r>
-                <a:rPr lang="ru" sz="1100" b="1">
-                  <a:solidFill>
-                    <a:schemeClr val="dk1"/>
-                  </a:solidFill>
-                </a:rPr>
-                <a:t>Оцените работу над проектом и ответьте на вопросы:</a:t>
-              </a:r>
-              <a:endParaRPr sz="1100" b="1">
-                <a:solidFill>
-                  <a:schemeClr val="dk1"/>
-                </a:solidFill>
-              </a:endParaRPr>
-            </a:p>
-            <a:p>
-              <a:pPr marL="457200" lvl="0" indent="-298450" algn="l" rtl="0">
-                <a:spcBef>
-                  <a:spcPts val="0"/>
-                </a:spcBef>
-                <a:spcAft>
-                  <a:spcPts val="0"/>
-                </a:spcAft>
-                <a:buClr>
-                  <a:schemeClr val="dk1"/>
-                </a:buClr>
-                <a:buSzPts val="1100"/>
-                <a:buAutoNum type="arabicPeriod"/>
-              </a:pPr>
-              <a:r>
-                <a:rPr lang="ru" sz="1100">
-                  <a:solidFill>
-                    <a:schemeClr val="dk1"/>
-                  </a:solidFill>
-                </a:rPr>
-                <a:t>У вас получилось достичь цели и выполнить все задачи?</a:t>
-              </a:r>
-              <a:endParaRPr sz="1100">
-                <a:solidFill>
-                  <a:schemeClr val="dk1"/>
-                </a:solidFill>
-              </a:endParaRPr>
-            </a:p>
-            <a:p>
-              <a:pPr marL="457200" lvl="0" indent="-298450" algn="l" rtl="0">
-                <a:spcBef>
-                  <a:spcPts val="0"/>
-                </a:spcBef>
-                <a:spcAft>
-                  <a:spcPts val="0"/>
-                </a:spcAft>
-                <a:buClr>
-                  <a:schemeClr val="dk1"/>
-                </a:buClr>
-                <a:buSzPts val="1100"/>
-                <a:buAutoNum type="arabicPeriod"/>
-              </a:pPr>
-              <a:r>
-                <a:rPr lang="ru" sz="1100">
-                  <a:solidFill>
-                    <a:schemeClr val="dk1"/>
-                  </a:solidFill>
-                </a:rPr>
-                <a:t>Что далось легко, а с чем возникли трудности?</a:t>
-              </a:r>
-              <a:endParaRPr sz="1100">
-                <a:solidFill>
-                  <a:schemeClr val="dk1"/>
-                </a:solidFill>
-              </a:endParaRPr>
-            </a:p>
-            <a:p>
-              <a:pPr marL="457200" lvl="0" indent="-298450" algn="l" rtl="0">
-                <a:spcBef>
-                  <a:spcPts val="0"/>
-                </a:spcBef>
-                <a:spcAft>
-                  <a:spcPts val="0"/>
-                </a:spcAft>
-                <a:buClr>
-                  <a:schemeClr val="dk1"/>
-                </a:buClr>
-                <a:buSzPts val="1100"/>
-                <a:buAutoNum type="arabicPeriod"/>
-              </a:pPr>
-              <a:r>
-                <a:rPr lang="ru" sz="1100">
-                  <a:solidFill>
-                    <a:schemeClr val="dk1"/>
-                  </a:solidFill>
-                </a:rPr>
-                <a:t>Сколько времени занял проект?</a:t>
-              </a:r>
-              <a:endParaRPr sz="1100">
-                <a:solidFill>
-                  <a:schemeClr val="dk1"/>
-                </a:solidFill>
-              </a:endParaRPr>
-            </a:p>
-            <a:p>
-              <a:pPr marL="457200" lvl="0" indent="-298450" algn="l" rtl="0">
-                <a:spcBef>
-                  <a:spcPts val="0"/>
-                </a:spcBef>
-                <a:spcAft>
-                  <a:spcPts val="0"/>
-                </a:spcAft>
-                <a:buClr>
-                  <a:schemeClr val="dk1"/>
-                </a:buClr>
-                <a:buSzPts val="1100"/>
-                <a:buAutoNum type="arabicPeriod"/>
-              </a:pPr>
-              <a:r>
-                <a:rPr lang="ru" sz="1100">
-                  <a:solidFill>
-                    <a:schemeClr val="dk1"/>
-                  </a:solidFill>
-                </a:rPr>
-                <a:t>Насколько полезным оказался для вас проект от 1 до 10?</a:t>
-              </a:r>
-              <a:endParaRPr sz="1100">
-                <a:solidFill>
-                  <a:schemeClr val="dk1"/>
-                </a:solidFill>
-              </a:endParaRPr>
-            </a:p>
-            <a:p>
-              <a:pPr marL="914400" lvl="1" indent="-298450" algn="l" rtl="0">
-                <a:spcBef>
-                  <a:spcPts val="0"/>
-                </a:spcBef>
-                <a:spcAft>
-                  <a:spcPts val="0"/>
-                </a:spcAft>
-                <a:buClr>
-                  <a:schemeClr val="dk1"/>
-                </a:buClr>
-                <a:buSzPts val="1100"/>
-                <a:buAutoNum type="alphaLcPeriod"/>
-              </a:pPr>
-              <a:r>
-                <a:rPr lang="ru" sz="1100">
-                  <a:solidFill>
-                    <a:schemeClr val="dk1"/>
-                  </a:solidFill>
-                </a:rPr>
-                <a:t>1 = я не научился ничему новому</a:t>
-              </a:r>
-              <a:endParaRPr sz="1100">
-                <a:solidFill>
-                  <a:schemeClr val="dk1"/>
-                </a:solidFill>
-              </a:endParaRPr>
-            </a:p>
-            <a:p>
-              <a:pPr marL="914400" lvl="1" indent="-298450" algn="l" rtl="0">
-                <a:spcBef>
-                  <a:spcPts val="0"/>
-                </a:spcBef>
-                <a:spcAft>
-                  <a:spcPts val="0"/>
-                </a:spcAft>
-                <a:buClr>
-                  <a:schemeClr val="dk1"/>
-                </a:buClr>
-                <a:buSzPts val="1100"/>
-                <a:buAutoNum type="alphaLcPeriod"/>
-              </a:pPr>
-              <a:r>
-                <a:rPr lang="ru" sz="1100">
-                  <a:solidFill>
-                    <a:schemeClr val="dk1"/>
-                  </a:solidFill>
-                </a:rPr>
-                <a:t>10 = очень полезно, я получил новый опыт</a:t>
-              </a:r>
-              <a:endParaRPr sz="1100">
-                <a:solidFill>
-                  <a:schemeClr val="dk1"/>
-                </a:solidFill>
-              </a:endParaRPr>
-            </a:p>
-            <a:p>
-              <a:pPr marL="457200" lvl="0" indent="-298450" algn="l" rtl="0">
-                <a:spcBef>
-                  <a:spcPts val="0"/>
-                </a:spcBef>
-                <a:spcAft>
-                  <a:spcPts val="0"/>
-                </a:spcAft>
-                <a:buClr>
-                  <a:schemeClr val="dk1"/>
-                </a:buClr>
-                <a:buSzPts val="1100"/>
-                <a:buAutoNum type="arabicPeriod"/>
-              </a:pPr>
-              <a:r>
-                <a:rPr lang="ru" sz="1100">
-                  <a:solidFill>
-                    <a:schemeClr val="dk1"/>
-                  </a:solidFill>
-                </a:rPr>
-                <a:t>Остались ли у вас вопросы по проекту?</a:t>
-              </a:r>
-              <a:endParaRPr sz="1100">
-                <a:solidFill>
-                  <a:schemeClr val="dk1"/>
-                </a:solidFill>
-              </a:endParaRPr>
-            </a:p>
-            <a:p>
-              <a:pPr marL="457200" lvl="0" indent="-298450" algn="l" rtl="0">
-                <a:spcBef>
-                  <a:spcPts val="0"/>
-                </a:spcBef>
-                <a:spcAft>
-                  <a:spcPts val="0"/>
-                </a:spcAft>
-                <a:buClr>
-                  <a:schemeClr val="dk1"/>
-                </a:buClr>
-                <a:buSzPts val="1100"/>
-                <a:buAutoNum type="arabicPeriod"/>
-              </a:pPr>
-              <a:r>
-                <a:rPr lang="ru" sz="1100">
-                  <a:solidFill>
-                    <a:schemeClr val="dk1"/>
-                  </a:solidFill>
-                </a:rPr>
-                <a:t>Как вы планируете развиваться дальше?</a:t>
-              </a:r>
-              <a:endParaRPr sz="1200">
-                <a:solidFill>
-                  <a:schemeClr val="dk1"/>
-                </a:solidFill>
-                <a:latin typeface="Roboto"/>
-                <a:ea typeface="Roboto"/>
-                <a:cs typeface="Roboto"/>
-                <a:sym typeface="Roboto"/>
-              </a:endParaRPr>
-            </a:p>
-          </p:txBody>
-        </p:sp>
-      </p:grpSp>
     </p:spTree>
+    <p:extLst>
+      <p:ext uri="{BB962C8B-B14F-4D97-AF65-F5344CB8AC3E}">
+        <p14:creationId xmlns:p14="http://schemas.microsoft.com/office/powerpoint/2010/main" val="4013658489"/>
+      </p:ext>
+    </p:extLst>
   </p:cSld>
   <p:clrMapOvr>
     <a:masterClrMapping/>
